--- a/pptx-output/03-first-safe-prompts-ask-plan-agent.pptx
+++ b/pptx-output/03-first-safe-prompts-ask-plan-agent.pptx
@@ -1153,7 +1153,7 @@
           <a:lstStyle/>
           <a:p>
             <a:r>
-              <a:t>Position Ask as the lowest-risk starting point and Agent as the highest-autonomy option.</a:t>
+              <a:t>Position Ask as the lowest-risk starting point, Edit as the next step up for targeted changes, and Agent as the highest-autonomy option.</a:t>
             </a:r>
           </a:p>
         </p:txBody>
@@ -1363,7 +1363,7 @@
           <a:lstStyle/>
           <a:p>
             <a:r>
-              <a:t>Emphasize that business meaning must remain intact even when wording improves. Use one KPI where a wording change would cause reporting drift if the definition moved.</a:t>
+              <a:t>The weak prompt produced a valid but uncommented measure with no guard. The specific prompt added a business-definition comment, a zero-revenue guard, and preserved the original logic. Ask learners: which would you feel confident merging into a shared Power BI model?</a:t>
             </a:r>
           </a:p>
         </p:txBody>
@@ -1433,7 +1433,7 @@
           <a:lstStyle/>
           <a:p>
             <a:r>
-              <a:t>Connect prompt quality to reproducibility and experiment reliability. A good answer should expose missing package, dataset, and random-seed assumptions.</a:t>
+              <a:t>The weak prompt generated a one-line comment that adds almost no value. The specific prompt produced a structured prerequisites block that another data scientist could actually use. Point out that the AI will match the precision of the prompt -- vague in, vague out.</a:t>
             </a:r>
           </a:p>
         </p:txBody>
@@ -1503,7 +1503,7 @@
           <a:lstStyle/>
           <a:p>
             <a:r>
-              <a:t>Emphasize operational safety and dependency awareness. The safest prompt improves supportability without rewriting pipeline logic.</a:t>
+              <a:t>The weak prompt produced a syntactically valid query but missed the NULL check, test-account filter, and had no operational context. The specific prompt gave the AI enough constraints to produce a production-ready transform. Ask: what would happen if the test-account filter was missing in your pipeline?</a:t>
             </a:r>
           </a:p>
         </p:txBody>
@@ -4633,7 +4633,7 @@
                 </a:solidFill>
                 <a:latin typeface="Segoe UI"/>
               </a:rPr>
-              <a:t>First Safe Prompts For Ask, Plan, And Agent</a:t>
+              <a:t>First Safe Prompts For Ask, Edit, Plan, And Agent</a:t>
             </a:r>
           </a:p>
         </p:txBody>
@@ -4893,7 +4893,7 @@
                 </a:solidFill>
                 <a:latin typeface="Segoe UI"/>
               </a:rPr>
-              <a:t>DE Example</a:t>
+              <a:t>DE Example -- Prompt-Driven SQL Transformation Fix</a:t>
             </a:r>
           </a:p>
         </p:txBody>
@@ -5022,7 +5022,7 @@
                 </a:solidFill>
                 <a:latin typeface="Segoe UI"/>
               </a:rPr>
-              <a:t>Explain an Airflow ingestion runbook</a:t>
+              <a:t>Scenario: Two prompts produce different quality fixes for a pipeline SQL transform.</a:t>
             </a:r>
           </a:p>
           <a:p>
@@ -5050,35 +5050,7 @@
                 </a:solidFill>
                 <a:latin typeface="Segoe UI"/>
               </a:rPr>
-              <a:t>Plan validation notes for upstream tables</a:t>
-            </a:r>
-          </a:p>
-          <a:p>
-            <a:pPr>
-              <a:spcBef>
-                <a:spcPts val="400"/>
-              </a:spcBef>
-              <a:spcAft>
-                <a:spcPts val="800"/>
-              </a:spcAft>
-            </a:pPr>
-            <a:r>
-              <a:rPr sz="1600">
-                <a:solidFill>
-                  <a:srgbClr val="2ECC71"/>
-                </a:solidFill>
-                <a:latin typeface="Segoe UI"/>
-              </a:rPr>
-              <a:t>●  </a:t>
-            </a:r>
-            <a:r>
-              <a:rPr sz="1800">
-                <a:solidFill>
-                  <a:srgbClr val="2C3E50"/>
-                </a:solidFill>
-                <a:latin typeface="Segoe UI"/>
-              </a:rPr>
-              <a:t>Add troubleshooting for failed daily backfills</a:t>
+              <a:t>Review: Which output is safe to deploy to production?</a:t>
             </a:r>
           </a:p>
         </p:txBody>
@@ -5196,7 +5168,7 @@
                 </a:solidFill>
                 <a:latin typeface="Segoe UI"/>
               </a:rPr>
-              <a:t>Emphasize operational safety and dependency awareness. The safest prompt improves supportability without rewriting pipeline logic.</a:t>
+              <a:t>The weak prompt produced a syntactically valid query but missed the NULL check, test-account filter, and had no operational context. The specific prompt gave the AI enough constraints to produce a production-ready transform. Ask: what would happen if the test-account filter was missing in your pipeline?</a:t>
             </a:r>
           </a:p>
         </p:txBody>
@@ -5247,7 +5219,7 @@
                   <a:srgbClr val="FFFFFF"/>
                 </a:solidFill>
               </a:rPr>
-              <a:t>First Safe Prompts For Ask, Plan, And Agent</a:t>
+              <a:t>First Safe Prompts For Ask, Edit, Plan, And Agent</a:t>
             </a:r>
           </a:p>
         </p:txBody>
@@ -5748,7 +5720,7 @@
                   <a:srgbClr val="FFFFFF"/>
                 </a:solidFill>
               </a:rPr>
-              <a:t>First Safe Prompts For Ask, Plan, And Agent</a:t>
+              <a:t>First Safe Prompts For Ask, Edit, Plan, And Agent</a:t>
             </a:r>
           </a:p>
         </p:txBody>
@@ -6277,7 +6249,7 @@
                   <a:srgbClr val="FFFFFF"/>
                 </a:solidFill>
               </a:rPr>
-              <a:t>First Safe Prompts For Ask, Plan, And Agent</a:t>
+              <a:t>First Safe Prompts For Ask, Edit, Plan, And Agent</a:t>
             </a:r>
           </a:p>
         </p:txBody>
@@ -6806,7 +6778,7 @@
                   <a:srgbClr val="FFFFFF"/>
                 </a:solidFill>
               </a:rPr>
-              <a:t>First Safe Prompts For Ask, Plan, And Agent</a:t>
+              <a:t>First Safe Prompts For Ask, Edit, Plan, And Agent</a:t>
             </a:r>
           </a:p>
         </p:txBody>
@@ -7307,7 +7279,7 @@
                   <a:srgbClr val="FFFFFF"/>
                 </a:solidFill>
               </a:rPr>
-              <a:t>First Safe Prompts For Ask, Plan, And Agent</a:t>
+              <a:t>First Safe Prompts For Ask, Edit, Plan, And Agent</a:t>
             </a:r>
           </a:p>
         </p:txBody>
@@ -7780,7 +7752,7 @@
                   <a:srgbClr val="FFFFFF"/>
                 </a:solidFill>
               </a:rPr>
-              <a:t>First Safe Prompts For Ask, Plan, And Agent</a:t>
+              <a:t>First Safe Prompts For Ask, Edit, Plan, And Agent</a:t>
             </a:r>
           </a:p>
         </p:txBody>
@@ -8309,7 +8281,7 @@
                   <a:srgbClr val="FFFFFF"/>
                 </a:solidFill>
               </a:rPr>
-              <a:t>First Safe Prompts For Ask, Plan, And Agent</a:t>
+              <a:t>First Safe Prompts For Ask, Edit, Plan, And Agent</a:t>
             </a:r>
           </a:p>
         </p:txBody>
@@ -8448,7 +8420,7 @@
                 </a:solidFill>
                 <a:latin typeface="Segoe UI"/>
               </a:rPr>
-              <a:t>First Safe Prompts For Ask, Plan, And Agent</a:t>
+              <a:t>First Safe Prompts For Ask, Edit, Plan, And Agent</a:t>
             </a:r>
           </a:p>
         </p:txBody>
@@ -8802,7 +8774,7 @@
                 </a:solidFill>
                 <a:latin typeface="Segoe UI"/>
               </a:rPr>
-              <a:t>First Safe Prompts For Ask, Plan, And Agent</a:t>
+              <a:t>First Safe Prompts For Ask, Edit, Plan, And Agent</a:t>
             </a:r>
           </a:p>
           <a:p>
@@ -9015,7 +8987,7 @@
                   <a:srgbClr val="FFFFFF"/>
                 </a:solidFill>
               </a:rPr>
-              <a:t>First Safe Prompts For Ask, Plan, And Agent</a:t>
+              <a:t>First Safe Prompts For Ask, Edit, Plan, And Agent</a:t>
             </a:r>
           </a:p>
         </p:txBody>
@@ -9291,7 +9263,7 @@
                 </a:solidFill>
                 <a:latin typeface="Segoe UI"/>
               </a:rPr>
-              <a:t>Choose Ask, Plan, or Agent appropriately</a:t>
+              <a:t>Choose Ask, Edit, Plan, or Agent appropriately</a:t>
             </a:r>
           </a:p>
           <a:p>
@@ -9544,7 +9516,7 @@
                   <a:srgbClr val="FFFFFF"/>
                 </a:solidFill>
               </a:rPr>
-              <a:t>First Safe Prompts For Ask, Plan, And Agent</a:t>
+              <a:t>First Safe Prompts For Ask, Edit, Plan, And Agent</a:t>
             </a:r>
           </a:p>
         </p:txBody>
@@ -10045,7 +10017,7 @@
                   <a:srgbClr val="FFFFFF"/>
                 </a:solidFill>
               </a:rPr>
-              <a:t>First Safe Prompts For Ask, Plan, And Agent</a:t>
+              <a:t>First Safe Prompts For Ask, Edit, Plan, And Agent</a:t>
             </a:r>
           </a:p>
         </p:txBody>
@@ -10192,7 +10164,7 @@
                 </a:solidFill>
                 <a:latin typeface="Segoe UI"/>
               </a:rPr>
-              <a:t>Ask, Plan, And Agent At A Glance</a:t>
+              <a:t>Ask, Edit, Plan, And Agent At A Glance</a:t>
             </a:r>
           </a:p>
         </p:txBody>
@@ -10349,7 +10321,7 @@
                 </a:solidFill>
                 <a:latin typeface="Segoe UI"/>
               </a:rPr>
-              <a:t>Plan: break work into reviewable steps</a:t>
+              <a:t>Edit: targeted inline changes with diff review</a:t>
             </a:r>
           </a:p>
           <a:p>
@@ -10377,6 +10349,34 @@
                 </a:solidFill>
                 <a:latin typeface="Segoe UI"/>
               </a:rPr>
+              <a:t>Plan: break work into reviewable steps</a:t>
+            </a:r>
+          </a:p>
+          <a:p>
+            <a:pPr>
+              <a:spcBef>
+                <a:spcPts val="400"/>
+              </a:spcBef>
+              <a:spcAft>
+                <a:spcPts val="800"/>
+              </a:spcAft>
+            </a:pPr>
+            <a:r>
+              <a:rPr sz="1600">
+                <a:solidFill>
+                  <a:srgbClr val="0078D4"/>
+                </a:solidFill>
+                <a:latin typeface="Segoe UI"/>
+              </a:rPr>
+              <a:t>●  </a:t>
+            </a:r>
+            <a:r>
+              <a:rPr sz="1800">
+                <a:solidFill>
+                  <a:srgbClr val="2C3E50"/>
+                </a:solidFill>
+                <a:latin typeface="Segoe UI"/>
+              </a:rPr>
               <a:t>Agent: perform bounded implementation work</a:t>
             </a:r>
           </a:p>
@@ -10495,7 +10495,7 @@
                 </a:solidFill>
                 <a:latin typeface="Segoe UI"/>
               </a:rPr>
-              <a:t>Position Ask as the lowest-risk starting point and Agent as the highest-autonomy option.</a:t>
+              <a:t>Position Ask as the lowest-risk starting point, Edit as the next step up for targeted changes, and Agent as the highest-autonomy option.</a:t>
             </a:r>
           </a:p>
         </p:txBody>
@@ -10546,7 +10546,7 @@
                   <a:srgbClr val="FFFFFF"/>
                 </a:solidFill>
               </a:rPr>
-              <a:t>First Safe Prompts For Ask, Plan, And Agent</a:t>
+              <a:t>First Safe Prompts For Ask, Edit, Plan, And Agent</a:t>
             </a:r>
           </a:p>
         </p:txBody>
@@ -11103,7 +11103,7 @@
                   <a:srgbClr val="FFFFFF"/>
                 </a:solidFill>
               </a:rPr>
-              <a:t>First Safe Prompts For Ask, Plan, And Agent</a:t>
+              <a:t>First Safe Prompts For Ask, Edit, Plan, And Agent</a:t>
             </a:r>
           </a:p>
         </p:txBody>
@@ -11660,7 +11660,7 @@
                   <a:srgbClr val="FFFFFF"/>
                 </a:solidFill>
               </a:rPr>
-              <a:t>First Safe Prompts For Ask, Plan, And Agent</a:t>
+              <a:t>First Safe Prompts For Ask, Edit, Plan, And Agent</a:t>
             </a:r>
           </a:p>
         </p:txBody>
@@ -11807,7 +11807,7 @@
                 </a:solidFill>
                 <a:latin typeface="Segoe UI"/>
               </a:rPr>
-              <a:t>BI Example</a:t>
+              <a:t>BI Example -- Prompt-Driven DAX Improvement</a:t>
             </a:r>
           </a:p>
         </p:txBody>
@@ -11936,7 +11936,7 @@
                 </a:solidFill>
                 <a:latin typeface="Segoe UI"/>
               </a:rPr>
-              <a:t>Explain a sales KPI glossary section</a:t>
+              <a:t>Scenario: Two prompts produce different DAX measure quality. Compare the outputs.</a:t>
             </a:r>
           </a:p>
           <a:p>
@@ -11964,35 +11964,7 @@
                 </a:solidFill>
                 <a:latin typeface="Segoe UI"/>
               </a:rPr>
-              <a:t>Plan clearer onboarding notes</a:t>
-            </a:r>
-          </a:p>
-          <a:p>
-            <a:pPr>
-              <a:spcBef>
-                <a:spcPts val="400"/>
-              </a:spcBef>
-              <a:spcAft>
-                <a:spcPts val="800"/>
-              </a:spcAft>
-            </a:pPr>
-            <a:r>
-              <a:rPr sz="1600">
-                <a:solidFill>
-                  <a:srgbClr val="2ECC71"/>
-                </a:solidFill>
-                <a:latin typeface="Segoe UI"/>
-              </a:rPr>
-              <a:t>●  </a:t>
-            </a:r>
-            <a:r>
-              <a:rPr sz="1800">
-                <a:solidFill>
-                  <a:srgbClr val="2C3E50"/>
-                </a:solidFill>
-                <a:latin typeface="Segoe UI"/>
-              </a:rPr>
-              <a:t>Add a validation checklist for gross margin and YTD revenue</a:t>
+              <a:t>Review: Which output is safer to approve? Why?</a:t>
             </a:r>
           </a:p>
         </p:txBody>
@@ -12110,7 +12082,7 @@
                 </a:solidFill>
                 <a:latin typeface="Segoe UI"/>
               </a:rPr>
-              <a:t>Emphasize that business meaning must remain intact even when wording improves. Use one KPI where a wording change would cause reporting drift if the definition moved.</a:t>
+              <a:t>The weak prompt produced a valid but uncommented measure with no guard. The specific prompt added a business-definition comment, a zero-revenue guard, and preserved the original logic. Ask learners: which would you feel confident merging into a shared Power BI model?</a:t>
             </a:r>
           </a:p>
         </p:txBody>
@@ -12161,7 +12133,7 @@
                   <a:srgbClr val="FFFFFF"/>
                 </a:solidFill>
               </a:rPr>
-              <a:t>First Safe Prompts For Ask, Plan, And Agent</a:t>
+              <a:t>First Safe Prompts For Ask, Edit, Plan, And Agent</a:t>
             </a:r>
           </a:p>
         </p:txBody>
@@ -12308,7 +12280,7 @@
                 </a:solidFill>
                 <a:latin typeface="Segoe UI"/>
               </a:rPr>
-              <a:t>DS Example</a:t>
+              <a:t>DS Example -- Prompt-Driven Notebook Improvement</a:t>
             </a:r>
           </a:p>
         </p:txBody>
@@ -12437,7 +12409,7 @@
                 </a:solidFill>
                 <a:latin typeface="Segoe UI"/>
               </a:rPr>
-              <a:t>Explain a churn-model notebook setup</a:t>
+              <a:t>Scenario: Two prompts produce different notebook documentation quality.</a:t>
             </a:r>
           </a:p>
           <a:p>
@@ -12465,35 +12437,7 @@
                 </a:solidFill>
                 <a:latin typeface="Segoe UI"/>
               </a:rPr>
-              <a:t>Plan reproducibility improvements</a:t>
-            </a:r>
-          </a:p>
-          <a:p>
-            <a:pPr>
-              <a:spcBef>
-                <a:spcPts val="400"/>
-              </a:spcBef>
-              <a:spcAft>
-                <a:spcPts val="800"/>
-              </a:spcAft>
-            </a:pPr>
-            <a:r>
-              <a:rPr sz="1600">
-                <a:solidFill>
-                  <a:srgbClr val="2ECC71"/>
-                </a:solidFill>
-                <a:latin typeface="Segoe UI"/>
-              </a:rPr>
-              <a:t>●  </a:t>
-            </a:r>
-            <a:r>
-              <a:rPr sz="1800">
-                <a:solidFill>
-                  <a:srgbClr val="2C3E50"/>
-                </a:solidFill>
-                <a:latin typeface="Segoe UI"/>
-              </a:rPr>
-              <a:t>Add environment, seed, and data-snapshot prerequisites</a:t>
+              <a:t>Review: Which output helps a teammate reproduce the experiment?</a:t>
             </a:r>
           </a:p>
         </p:txBody>
@@ -12611,7 +12555,7 @@
                 </a:solidFill>
                 <a:latin typeface="Segoe UI"/>
               </a:rPr>
-              <a:t>Connect prompt quality to reproducibility and experiment reliability. A good answer should expose missing package, dataset, and random-seed assumptions.</a:t>
+              <a:t>The weak prompt generated a one-line comment that adds almost no value. The specific prompt produced a structured prerequisites block that another data scientist could actually use. Point out that the AI will match the precision of the prompt -- vague in, vague out.</a:t>
             </a:r>
           </a:p>
         </p:txBody>
@@ -12662,7 +12606,7 @@
                   <a:srgbClr val="FFFFFF"/>
                 </a:solidFill>
               </a:rPr>
-              <a:t>First Safe Prompts For Ask, Plan, And Agent</a:t>
+              <a:t>First Safe Prompts For Ask, Edit, Plan, And Agent</a:t>
             </a:r>
           </a:p>
         </p:txBody>
